--- a/11а клас/РС/7. Свързване на приложения с бази от данни/05. Да напишем ORM.pptx
+++ b/11а клас/РС/7. Свързване на приложения с бази от данни/05. Да напишем ORM.pptx
@@ -5,7 +5,7 @@
     <p:sldMasterId id="2147483684" r:id="rId1"/>
   </p:sldMasterIdLst>
   <p:notesMasterIdLst>
-    <p:notesMasterId r:id="rId15"/>
+    <p:notesMasterId r:id="rId16"/>
   </p:notesMasterIdLst>
   <p:sldIdLst>
     <p:sldId id="258" r:id="rId2"/>
@@ -20,7 +20,8 @@
     <p:sldId id="632" r:id="rId11"/>
     <p:sldId id="633" r:id="rId12"/>
     <p:sldId id="634" r:id="rId13"/>
-    <p:sldId id="572" r:id="rId14"/>
+    <p:sldId id="635" r:id="rId14"/>
+    <p:sldId id="636" r:id="rId15"/>
   </p:sldIdLst>
   <p:sldSz cx="12192000" cy="6858000"/>
   <p:notesSz cx="6858000" cy="9144000"/>
@@ -144,7 +145,8 @@
         </p14:section>
         <p14:section name="Заключение" id="{9315BEE7-605C-4839-996A-A4EEA70921D9}">
           <p14:sldIdLst>
-            <p14:sldId id="572"/>
+            <p14:sldId id="635"/>
+            <p14:sldId id="636"/>
           </p14:sldIdLst>
         </p14:section>
       </p14:sectionLst>
@@ -768,7 +770,7 @@
           <a:p>
             <a:fld id="{6CA0D3FF-81AC-477B-919E-75762E6B2153}" type="datetimeFigureOut">
               <a:rPr lang="bg-BG" smtClean="0"/>
-              <a:t>22.2.2023 г.</a:t>
+              <a:t>25.3.2026 г.</a:t>
             </a:fld>
             <a:endParaRPr lang="bg-BG"/>
           </a:p>
@@ -1055,118 +1057,190 @@
       </p:grpSpPr>
       <p:sp>
         <p:nvSpPr>
-          <p:cNvPr id="445442" name="Rectangle 2"/>
-          <p:cNvSpPr>
-            <a:spLocks noGrp="1" noRot="1" noChangeAspect="1" noChangeArrowheads="1" noTextEdit="1"/>
-          </p:cNvSpPr>
-          <p:nvPr>
-            <p:ph type="sldImg"/>
-          </p:nvPr>
-        </p:nvSpPr>
-        <p:spPr>
-          <a:ln/>
-        </p:spPr>
-      </p:sp>
-      <p:sp>
-        <p:nvSpPr>
-          <p:cNvPr id="445443" name="Rectangle 3"/>
-          <p:cNvSpPr>
-            <a:spLocks noGrp="1" noChangeArrowheads="1"/>
-          </p:cNvSpPr>
-          <p:nvPr>
-            <p:ph type="body" idx="1"/>
+          <p:cNvPr id="2" name="Slide Image Placeholder 1"/>
+          <p:cNvSpPr>
+            <a:spLocks noGrp="1" noRot="1" noChangeAspect="1"/>
+          </p:cNvSpPr>
+          <p:nvPr>
+            <p:ph type="sldImg" idx="2"/>
           </p:nvPr>
         </p:nvSpPr>
         <p:spPr/>
+      </p:sp>
+      <p:sp>
+        <p:nvSpPr>
+          <p:cNvPr id="3" name="Notes Placeholder 2"/>
+          <p:cNvSpPr>
+            <a:spLocks noGrp="1"/>
+          </p:cNvSpPr>
+          <p:nvPr>
+            <p:ph type="body" sz="quarter" idx="3"/>
+          </p:nvPr>
+        </p:nvSpPr>
+        <p:spPr/>
         <p:txBody>
           <a:bodyPr/>
           <a:lstStyle/>
           <a:p>
-            <a:endParaRPr lang="bg-BG"/>
-          </a:p>
-        </p:txBody>
-      </p:sp>
-      <p:sp>
-        <p:nvSpPr>
-          <p:cNvPr id="4" name="Footer Placeholder">
-            <a:extLst>
-              <a:ext uri="{FF2B5EF4-FFF2-40B4-BE49-F238E27FC236}">
-                <a16:creationId xmlns:a16="http://schemas.microsoft.com/office/drawing/2014/main" id="{3CB8708A-8556-42FD-AFB9-1485951BC6C6}"/>
-              </a:ext>
-            </a:extLst>
-          </p:cNvPr>
-          <p:cNvSpPr>
-            <a:spLocks noGrp="1"/>
-          </p:cNvSpPr>
-          <p:nvPr>
-            <p:ph type="ftr" sz="quarter" idx="4"/>
-          </p:nvPr>
-        </p:nvSpPr>
-        <p:spPr>
-          <a:xfrm>
-            <a:off x="-1" y="8747999"/>
-            <a:ext cx="6308999" cy="394413"/>
-          </a:xfrm>
-          <a:prstGeom prst="rect">
-            <a:avLst/>
-          </a:prstGeom>
-        </p:spPr>
-        <p:txBody>
-          <a:bodyPr vert="horz" lIns="91440" tIns="45720" rIns="91440" bIns="45720" rtlCol="0" anchor="b"/>
-          <a:lstStyle>
-            <a:lvl1pPr algn="l">
-              <a:defRPr sz="1000"/>
-            </a:lvl1pPr>
-          </a:lstStyle>
-          <a:p>
-            <a:r>
-              <a:rPr lang="en-US" dirty="0"/>
-              <a:t>Created by the </a:t>
-            </a:r>
-            <a:r>
-              <a:rPr lang="en-US" b="1" dirty="0"/>
-              <a:t>Software University Foundation</a:t>
-            </a:r>
-            <a:r>
-              <a:rPr lang="en-US" dirty="0"/>
-              <a:t> – </a:t>
-            </a:r>
-            <a:r>
-              <a:rPr lang="en-US" u="sng" dirty="0">
-                <a:hlinkClick r:id="rId3"/>
-              </a:rPr>
-              <a:t>https://softuni.foundation</a:t>
-            </a:r>
-            <a:endParaRPr lang="en-US" dirty="0"/>
-          </a:p>
-          <a:p>
-            <a:r>
-              <a:rPr lang="en-US" dirty="0"/>
-              <a:t>This work is licensed under the </a:t>
-            </a:r>
-            <a:r>
-              <a:rPr lang="en-US" u="sng" noProof="1">
-                <a:hlinkClick r:id="rId4"/>
-              </a:rPr>
-              <a:t>Creative Commons Attribution-NonCommercial-ShareAlike</a:t>
-            </a:r>
-            <a:r>
-              <a:rPr lang="en-US" noProof="1"/>
-              <a:t> </a:t>
-            </a:r>
-            <a:r>
-              <a:rPr lang="en-US" dirty="0"/>
-              <a:t>license.</a:t>
-            </a:r>
-          </a:p>
-        </p:txBody>
+            <a:r>
+              <a:t>ЦЕЛ: Да разберем как работи EFC отвътре. MiniORM е учебен проект.</a:t>
+            </a:r>
+          </a:p>
+        </p:txBody>
+      </p:sp>
+      <p:sp>
+        <p:nvSpPr>
+          <p:cNvPr id="4" name="Slide Number Placeholder 3"/>
+          <p:cNvSpPr>
+            <a:spLocks noGrp="1"/>
+          </p:cNvSpPr>
+          <p:nvPr>
+            <p:ph type="sldNum" sz="quarter" idx="5"/>
+          </p:nvPr>
+        </p:nvSpPr>
+        <p:spPr/>
       </p:sp>
     </p:spTree>
-    <p:extLst>
-      <p:ext uri="{BB962C8B-B14F-4D97-AF65-F5344CB8AC3E}">
-        <p14:creationId xmlns:p14="http://schemas.microsoft.com/office/powerpoint/2010/main" val="4272781246"/>
-      </p:ext>
-    </p:extLst>
+  </p:cSld>
+  <p:clrMapOvr>
+    <a:masterClrMapping/>
+  </p:clrMapOvr>
+</p:notes>
+</file>
+
+<file path=ppt/notesSlides/notesSlide10.xml><?xml version="1.0" encoding="utf-8"?>
+<p:notes xmlns:a="http://schemas.openxmlformats.org/drawingml/2006/main" xmlns:r="http://schemas.openxmlformats.org/officeDocument/2006/relationships" xmlns:p="http://schemas.openxmlformats.org/presentationml/2006/main">
+  <p:cSld>
+    <p:spTree>
+      <p:nvGrpSpPr>
+        <p:cNvPr id="1" name=""/>
+        <p:cNvGrpSpPr/>
+        <p:nvPr/>
+      </p:nvGrpSpPr>
+      <p:grpSpPr>
+        <a:xfrm>
+          <a:off x="0" y="0"/>
+          <a:ext cx="0" cy="0"/>
+          <a:chOff x="0" y="0"/>
+          <a:chExt cx="0" cy="0"/>
+        </a:xfrm>
+      </p:grpSpPr>
+      <p:sp>
+        <p:nvSpPr>
+          <p:cNvPr id="2" name="Slide Image Placeholder 1"/>
+          <p:cNvSpPr>
+            <a:spLocks noGrp="1" noRot="1" noChangeAspect="1"/>
+          </p:cNvSpPr>
+          <p:nvPr>
+            <p:ph type="sldImg" idx="2"/>
+          </p:nvPr>
+        </p:nvSpPr>
+        <p:spPr/>
+      </p:sp>
+      <p:sp>
+        <p:nvSpPr>
+          <p:cNvPr id="3" name="Notes Placeholder 2"/>
+          <p:cNvSpPr>
+            <a:spLocks noGrp="1"/>
+          </p:cNvSpPr>
+          <p:nvPr>
+            <p:ph type="body" sz="quarter" idx="3"/>
+          </p:nvPr>
+        </p:nvSpPr>
+        <p:spPr/>
+        <p:txBody>
+          <a:bodyPr/>
+          <a:lstStyle/>
+          <a:p>
+            <a:r>
+              <a:t>Демо: typeof(string).GetMethods() -&gt; всички методи на string.</a:t>
+            </a:r>
+          </a:p>
+        </p:txBody>
+      </p:sp>
+      <p:sp>
+        <p:nvSpPr>
+          <p:cNvPr id="4" name="Slide Number Placeholder 3"/>
+          <p:cNvSpPr>
+            <a:spLocks noGrp="1"/>
+          </p:cNvSpPr>
+          <p:nvPr>
+            <p:ph type="sldNum" sz="quarter" idx="5"/>
+          </p:nvPr>
+        </p:nvSpPr>
+        <p:spPr/>
+      </p:sp>
+    </p:spTree>
+  </p:cSld>
+  <p:clrMapOvr>
+    <a:masterClrMapping/>
+  </p:clrMapOvr>
+</p:notes>
+</file>
+
+<file path=ppt/notesSlides/notesSlide11.xml><?xml version="1.0" encoding="utf-8"?>
+<p:notes xmlns:a="http://schemas.openxmlformats.org/drawingml/2006/main" xmlns:r="http://schemas.openxmlformats.org/officeDocument/2006/relationships" xmlns:p="http://schemas.openxmlformats.org/presentationml/2006/main">
+  <p:cSld>
+    <p:spTree>
+      <p:nvGrpSpPr>
+        <p:cNvPr id="1" name=""/>
+        <p:cNvGrpSpPr/>
+        <p:nvPr/>
+      </p:nvGrpSpPr>
+      <p:grpSpPr>
+        <a:xfrm>
+          <a:off x="0" y="0"/>
+          <a:ext cx="0" cy="0"/>
+          <a:chOff x="0" y="0"/>
+          <a:chExt cx="0" cy="0"/>
+        </a:xfrm>
+      </p:grpSpPr>
+      <p:sp>
+        <p:nvSpPr>
+          <p:cNvPr id="2" name="Slide Image Placeholder 1"/>
+          <p:cNvSpPr>
+            <a:spLocks noGrp="1" noRot="1" noChangeAspect="1"/>
+          </p:cNvSpPr>
+          <p:nvPr>
+            <p:ph type="sldImg" idx="2"/>
+          </p:nvPr>
+        </p:nvSpPr>
+        <p:spPr/>
+      </p:sp>
+      <p:sp>
+        <p:nvSpPr>
+          <p:cNvPr id="3" name="Notes Placeholder 2"/>
+          <p:cNvSpPr>
+            <a:spLocks noGrp="1"/>
+          </p:cNvSpPr>
+          <p:nvPr>
+            <p:ph type="body" sz="quarter" idx="3"/>
+          </p:nvPr>
+        </p:nvSpPr>
+        <p:spPr/>
+        <p:txBody>
+          <a:bodyPr/>
+          <a:lstStyle/>
+          <a:p>
+            <a:r>
+              <a:t>Учениците трябва да знаят кой клас отговаря за какво.</a:t>
+            </a:r>
+          </a:p>
+        </p:txBody>
+      </p:sp>
+      <p:sp>
+        <p:nvSpPr>
+          <p:cNvPr id="4" name="Slide Number Placeholder 3"/>
+          <p:cNvSpPr>
+            <a:spLocks noGrp="1"/>
+          </p:cNvSpPr>
+          <p:nvPr>
+            <p:ph type="sldNum" sz="quarter" idx="5"/>
+          </p:nvPr>
+        </p:nvSpPr>
+        <p:spPr/>
+      </p:sp>
+    </p:spTree>
   </p:cSld>
   <p:clrMapOvr>
     <a:masterClrMapping/>
@@ -1193,65 +1267,45 @@
       </p:grpSpPr>
       <p:sp>
         <p:nvSpPr>
-          <p:cNvPr id="2" name="Slide Image Placeholder 1"/>
-          <p:cNvSpPr>
-            <a:spLocks noGrp="1" noRot="1" noChangeAspect="1"/>
+          <p:cNvPr id="445442" name="Rectangle 2"/>
+          <p:cNvSpPr>
+            <a:spLocks noGrp="1" noRot="1" noChangeAspect="1" noChangeArrowheads="1" noTextEdit="1"/>
           </p:cNvSpPr>
           <p:nvPr>
             <p:ph type="sldImg"/>
           </p:nvPr>
         </p:nvSpPr>
+        <p:spPr>
+          <a:ln/>
+        </p:spPr>
+      </p:sp>
+      <p:sp>
+        <p:nvSpPr>
+          <p:cNvPr id="445443" name="Rectangle 3"/>
+          <p:cNvSpPr>
+            <a:spLocks noGrp="1" noChangeArrowheads="1"/>
+          </p:cNvSpPr>
+          <p:nvPr>
+            <p:ph type="body" idx="1"/>
+          </p:nvPr>
+        </p:nvSpPr>
         <p:spPr/>
-      </p:sp>
-      <p:sp>
-        <p:nvSpPr>
-          <p:cNvPr id="3" name="Notes Placeholder 2"/>
-          <p:cNvSpPr>
-            <a:spLocks noGrp="1"/>
-          </p:cNvSpPr>
-          <p:nvPr>
-            <p:ph type="body" idx="1"/>
-          </p:nvPr>
-        </p:nvSpPr>
-        <p:spPr/>
         <p:txBody>
           <a:bodyPr/>
           <a:lstStyle/>
           <a:p>
-            <a:endParaRPr lang="en-US"/>
-          </a:p>
-        </p:txBody>
-      </p:sp>
-      <p:sp>
-        <p:nvSpPr>
-          <p:cNvPr id="5" name="Slide Number Placeholder 4"/>
-          <p:cNvSpPr>
-            <a:spLocks noGrp="1"/>
-          </p:cNvSpPr>
-          <p:nvPr>
-            <p:ph type="sldNum" sz="quarter" idx="11"/>
-          </p:nvPr>
-        </p:nvSpPr>
-        <p:spPr/>
-        <p:txBody>
-          <a:bodyPr/>
-          <a:lstStyle/>
-          <a:p>
-            <a:fld id="{3EBA5BD7-F043-4D1B-AA17-CD412FC534DE}" type="slidenum">
-              <a:rPr lang="en-US" smtClean="0"/>
-              <a:pPr/>
-              <a:t>7</a:t>
-            </a:fld>
-            <a:endParaRPr lang="en-US" dirty="0"/>
-          </a:p>
-        </p:txBody>
-      </p:sp>
-      <p:sp>
-        <p:nvSpPr>
-          <p:cNvPr id="6" name="Footer Placeholder">
+            <a:r>
+              <a:t>Рефлексията е ключова - четем метаданни за класовете по време на изпълнение.</a:t>
+            </a:r>
+          </a:p>
+        </p:txBody>
+      </p:sp>
+      <p:sp>
+        <p:nvSpPr>
+          <p:cNvPr id="4" name="Footer Placeholder">
             <a:extLst>
               <a:ext uri="{FF2B5EF4-FFF2-40B4-BE49-F238E27FC236}">
-                <a16:creationId xmlns:a16="http://schemas.microsoft.com/office/drawing/2014/main" id="{00C6ED27-037B-4E22-A7E4-A00836B67DB4}"/>
+                <a16:creationId xmlns:a16="http://schemas.microsoft.com/office/drawing/2014/main" id="{3CB8708A-8556-42FD-AFB9-1485951BC6C6}"/>
               </a:ext>
             </a:extLst>
           </p:cNvPr>
@@ -1324,7 +1378,7 @@
     </p:spTree>
     <p:extLst>
       <p:ext uri="{BB962C8B-B14F-4D97-AF65-F5344CB8AC3E}">
-        <p14:creationId xmlns:p14="http://schemas.microsoft.com/office/powerpoint/2010/main" val="780899183"/>
+        <p14:creationId xmlns:p14="http://schemas.microsoft.com/office/powerpoint/2010/main" val="4272781246"/>
       </p:ext>
     </p:extLst>
   </p:cSld>
@@ -1358,6 +1412,286 @@
             <a:spLocks noGrp="1" noRot="1" noChangeAspect="1"/>
           </p:cNvSpPr>
           <p:nvPr>
+            <p:ph type="sldImg" idx="2"/>
+          </p:nvPr>
+        </p:nvSpPr>
+        <p:spPr/>
+      </p:sp>
+      <p:sp>
+        <p:nvSpPr>
+          <p:cNvPr id="3" name="Notes Placeholder 2"/>
+          <p:cNvSpPr>
+            <a:spLocks noGrp="1"/>
+          </p:cNvSpPr>
+          <p:nvPr>
+            <p:ph type="body" sz="quarter" idx="3"/>
+          </p:nvPr>
+        </p:nvSpPr>
+        <p:spPr/>
+        <p:txBody>
+          <a:bodyPr/>
+          <a:lstStyle/>
+          <a:p>
+            <a:r>
+              <a:t>Database-First: БД вече съществува. Flow: Connection -&gt; DbContext -&gt; DbSet&lt;T&gt; -&gt; CRUD.</a:t>
+            </a:r>
+          </a:p>
+        </p:txBody>
+      </p:sp>
+      <p:sp>
+        <p:nvSpPr>
+          <p:cNvPr id="4" name="Slide Number Placeholder 3"/>
+          <p:cNvSpPr>
+            <a:spLocks noGrp="1"/>
+          </p:cNvSpPr>
+          <p:nvPr>
+            <p:ph type="sldNum" sz="quarter" idx="5"/>
+          </p:nvPr>
+        </p:nvSpPr>
+        <p:spPr/>
+      </p:sp>
+    </p:spTree>
+  </p:cSld>
+  <p:clrMapOvr>
+    <a:masterClrMapping/>
+  </p:clrMapOvr>
+</p:notes>
+</file>
+
+<file path=ppt/notesSlides/notesSlide4.xml><?xml version="1.0" encoding="utf-8"?>
+<p:notes xmlns:a="http://schemas.openxmlformats.org/drawingml/2006/main" xmlns:r="http://schemas.openxmlformats.org/officeDocument/2006/relationships" xmlns:p="http://schemas.openxmlformats.org/presentationml/2006/main">
+  <p:cSld>
+    <p:spTree>
+      <p:nvGrpSpPr>
+        <p:cNvPr id="1" name=""/>
+        <p:cNvGrpSpPr/>
+        <p:nvPr/>
+      </p:nvGrpSpPr>
+      <p:grpSpPr>
+        <a:xfrm>
+          <a:off x="0" y="0"/>
+          <a:ext cx="0" cy="0"/>
+          <a:chOff x="0" y="0"/>
+          <a:chExt cx="0" cy="0"/>
+        </a:xfrm>
+      </p:grpSpPr>
+      <p:sp>
+        <p:nvSpPr>
+          <p:cNvPr id="2" name="Slide Image Placeholder 1"/>
+          <p:cNvSpPr>
+            <a:spLocks noGrp="1" noRot="1" noChangeAspect="1"/>
+          </p:cNvSpPr>
+          <p:nvPr>
+            <p:ph type="sldImg" idx="2"/>
+          </p:nvPr>
+        </p:nvSpPr>
+        <p:spPr/>
+      </p:sp>
+      <p:sp>
+        <p:nvSpPr>
+          <p:cNvPr id="3" name="Notes Placeholder 2"/>
+          <p:cNvSpPr>
+            <a:spLocks noGrp="1"/>
+          </p:cNvSpPr>
+          <p:nvPr>
+            <p:ph type="body" sz="quarter" idx="3"/>
+          </p:nvPr>
+        </p:nvSpPr>
+        <p:spPr/>
+        <p:txBody>
+          <a:bodyPr/>
+          <a:lstStyle/>
+          <a:p>
+            <a:r>
+              <a:t>Рефлексия: typeof(Employee).GetProperties() -&gt; намираме свойствата автоматично.</a:t>
+            </a:r>
+          </a:p>
+        </p:txBody>
+      </p:sp>
+      <p:sp>
+        <p:nvSpPr>
+          <p:cNvPr id="4" name="Slide Number Placeholder 3"/>
+          <p:cNvSpPr>
+            <a:spLocks noGrp="1"/>
+          </p:cNvSpPr>
+          <p:nvPr>
+            <p:ph type="sldNum" sz="quarter" idx="5"/>
+          </p:nvPr>
+        </p:nvSpPr>
+        <p:spPr/>
+      </p:sp>
+    </p:spTree>
+  </p:cSld>
+  <p:clrMapOvr>
+    <a:masterClrMapping/>
+  </p:clrMapOvr>
+</p:notes>
+</file>
+
+<file path=ppt/notesSlides/notesSlide5.xml><?xml version="1.0" encoding="utf-8"?>
+<p:notes xmlns:a="http://schemas.openxmlformats.org/drawingml/2006/main" xmlns:r="http://schemas.openxmlformats.org/officeDocument/2006/relationships" xmlns:p="http://schemas.openxmlformats.org/presentationml/2006/main">
+  <p:cSld>
+    <p:spTree>
+      <p:nvGrpSpPr>
+        <p:cNvPr id="1" name=""/>
+        <p:cNvGrpSpPr/>
+        <p:nvPr/>
+      </p:nvGrpSpPr>
+      <p:grpSpPr>
+        <a:xfrm>
+          <a:off x="0" y="0"/>
+          <a:ext cx="0" cy="0"/>
+          <a:chOff x="0" y="0"/>
+          <a:chExt cx="0" cy="0"/>
+        </a:xfrm>
+      </p:grpSpPr>
+      <p:sp>
+        <p:nvSpPr>
+          <p:cNvPr id="2" name="Slide Image Placeholder 1"/>
+          <p:cNvSpPr>
+            <a:spLocks noGrp="1" noRot="1" noChangeAspect="1"/>
+          </p:cNvSpPr>
+          <p:nvPr>
+            <p:ph type="sldImg" idx="2"/>
+          </p:nvPr>
+        </p:nvSpPr>
+        <p:spPr/>
+      </p:sp>
+      <p:sp>
+        <p:nvSpPr>
+          <p:cNvPr id="3" name="Notes Placeholder 2"/>
+          <p:cNvSpPr>
+            <a:spLocks noGrp="1"/>
+          </p:cNvSpPr>
+          <p:nvPr>
+            <p:ph type="body" sz="quarter" idx="3"/>
+          </p:nvPr>
+        </p:nvSpPr>
+        <p:spPr/>
+        <p:txBody>
+          <a:bodyPr/>
+          <a:lstStyle/>
+          <a:p>
+            <a:r>
+              <a:t>DbContext = 'папка'. DbSets = 'файлове'. ChangeTracker = история на Ctrl+Z.</a:t>
+            </a:r>
+          </a:p>
+        </p:txBody>
+      </p:sp>
+      <p:sp>
+        <p:nvSpPr>
+          <p:cNvPr id="4" name="Slide Number Placeholder 3"/>
+          <p:cNvSpPr>
+            <a:spLocks noGrp="1"/>
+          </p:cNvSpPr>
+          <p:nvPr>
+            <p:ph type="sldNum" sz="quarter" idx="5"/>
+          </p:nvPr>
+        </p:nvSpPr>
+        <p:spPr/>
+      </p:sp>
+    </p:spTree>
+  </p:cSld>
+  <p:clrMapOvr>
+    <a:masterClrMapping/>
+  </p:clrMapOvr>
+</p:notes>
+</file>
+
+<file path=ppt/notesSlides/notesSlide6.xml><?xml version="1.0" encoding="utf-8"?>
+<p:notes xmlns:a="http://schemas.openxmlformats.org/drawingml/2006/main" xmlns:r="http://schemas.openxmlformats.org/officeDocument/2006/relationships" xmlns:p="http://schemas.openxmlformats.org/presentationml/2006/main">
+  <p:cSld>
+    <p:spTree>
+      <p:nvGrpSpPr>
+        <p:cNvPr id="1" name=""/>
+        <p:cNvGrpSpPr/>
+        <p:nvPr/>
+      </p:nvGrpSpPr>
+      <p:grpSpPr>
+        <a:xfrm>
+          <a:off x="0" y="0"/>
+          <a:ext cx="0" cy="0"/>
+          <a:chOff x="0" y="0"/>
+          <a:chExt cx="0" cy="0"/>
+        </a:xfrm>
+      </p:grpSpPr>
+      <p:sp>
+        <p:nvSpPr>
+          <p:cNvPr id="2" name="Slide Image Placeholder 1"/>
+          <p:cNvSpPr>
+            <a:spLocks noGrp="1" noRot="1" noChangeAspect="1"/>
+          </p:cNvSpPr>
+          <p:nvPr>
+            <p:ph type="sldImg" idx="2"/>
+          </p:nvPr>
+        </p:nvSpPr>
+        <p:spPr/>
+      </p:sp>
+      <p:sp>
+        <p:nvSpPr>
+          <p:cNvPr id="3" name="Notes Placeholder 2"/>
+          <p:cNvSpPr>
+            <a:spLocks noGrp="1"/>
+          </p:cNvSpPr>
+          <p:nvPr>
+            <p:ph type="body" sz="quarter" idx="3"/>
+          </p:nvPr>
+        </p:nvSpPr>
+        <p:spPr/>
+        <p:txBody>
+          <a:bodyPr/>
+          <a:lstStyle/>
+          <a:p>
+            <a:r>
+              <a:t>Навигационни свойства = JOIN в обектния свят. employee.Department вместо SELECT JOIN.</a:t>
+            </a:r>
+          </a:p>
+        </p:txBody>
+      </p:sp>
+      <p:sp>
+        <p:nvSpPr>
+          <p:cNvPr id="4" name="Slide Number Placeholder 3"/>
+          <p:cNvSpPr>
+            <a:spLocks noGrp="1"/>
+          </p:cNvSpPr>
+          <p:nvPr>
+            <p:ph type="sldNum" sz="quarter" idx="5"/>
+          </p:nvPr>
+        </p:nvSpPr>
+        <p:spPr/>
+      </p:sp>
+    </p:spTree>
+  </p:cSld>
+  <p:clrMapOvr>
+    <a:masterClrMapping/>
+  </p:clrMapOvr>
+</p:notes>
+</file>
+
+<file path=ppt/notesSlides/notesSlide7.xml><?xml version="1.0" encoding="utf-8"?>
+<p:notes xmlns:a="http://schemas.openxmlformats.org/drawingml/2006/main" xmlns:r="http://schemas.openxmlformats.org/officeDocument/2006/relationships" xmlns:p="http://schemas.openxmlformats.org/presentationml/2006/main">
+  <p:cSld>
+    <p:spTree>
+      <p:nvGrpSpPr>
+        <p:cNvPr id="1" name=""/>
+        <p:cNvGrpSpPr/>
+        <p:nvPr/>
+      </p:nvGrpSpPr>
+      <p:grpSpPr>
+        <a:xfrm>
+          <a:off x="0" y="0"/>
+          <a:ext cx="0" cy="0"/>
+          <a:chOff x="0" y="0"/>
+          <a:chExt cx="0" cy="0"/>
+        </a:xfrm>
+      </p:grpSpPr>
+      <p:sp>
+        <p:nvSpPr>
+          <p:cNvPr id="2" name="Slide Image Placeholder 1"/>
+          <p:cNvSpPr>
+            <a:spLocks noGrp="1" noRot="1" noChangeAspect="1"/>
+          </p:cNvSpPr>
+          <p:nvPr>
             <p:ph type="sldImg"/>
           </p:nvPr>
         </p:nvSpPr>
@@ -1378,7 +1712,9 @@
           <a:bodyPr/>
           <a:lstStyle/>
           <a:p>
-            <a:endParaRPr lang="en-US"/>
+            <a:r>
+              <a:t>Entity = POCO клас. [Key]=PK, [Required]=NOT NULL, [ForeignKey]=FK.</a:t>
+            </a:r>
           </a:p>
         </p:txBody>
       </p:sp>
@@ -1400,7 +1736,7 @@
             <a:fld id="{3EBA5BD7-F043-4D1B-AA17-CD412FC534DE}" type="slidenum">
               <a:rPr lang="en-US" smtClean="0"/>
               <a:pPr/>
-              <a:t>8</a:t>
+              <a:t>7</a:t>
             </a:fld>
             <a:endParaRPr lang="en-US" dirty="0"/>
           </a:p>
@@ -1411,7 +1747,7 @@
           <p:cNvPr id="6" name="Footer Placeholder">
             <a:extLst>
               <a:ext uri="{FF2B5EF4-FFF2-40B4-BE49-F238E27FC236}">
-                <a16:creationId xmlns:a16="http://schemas.microsoft.com/office/drawing/2014/main" id="{F2E7AA30-B4A7-4547-B0A0-1F4BBD26848C}"/>
+                <a16:creationId xmlns:a16="http://schemas.microsoft.com/office/drawing/2014/main" id="{00C6ED27-037B-4E22-A7E4-A00836B67DB4}"/>
               </a:ext>
             </a:extLst>
           </p:cNvPr>
@@ -1484,9 +1820,241 @@
     </p:spTree>
     <p:extLst>
       <p:ext uri="{BB962C8B-B14F-4D97-AF65-F5344CB8AC3E}">
+        <p14:creationId xmlns:p14="http://schemas.microsoft.com/office/powerpoint/2010/main" val="780899183"/>
+      </p:ext>
+    </p:extLst>
+  </p:cSld>
+  <p:clrMapOvr>
+    <a:masterClrMapping/>
+  </p:clrMapOvr>
+</p:notes>
+</file>
+
+<file path=ppt/notesSlides/notesSlide8.xml><?xml version="1.0" encoding="utf-8"?>
+<p:notes xmlns:a="http://schemas.openxmlformats.org/drawingml/2006/main" xmlns:r="http://schemas.openxmlformats.org/officeDocument/2006/relationships" xmlns:p="http://schemas.openxmlformats.org/presentationml/2006/main">
+  <p:cSld>
+    <p:spTree>
+      <p:nvGrpSpPr>
+        <p:cNvPr id="1" name=""/>
+        <p:cNvGrpSpPr/>
+        <p:nvPr/>
+      </p:nvGrpSpPr>
+      <p:grpSpPr>
+        <a:xfrm>
+          <a:off x="0" y="0"/>
+          <a:ext cx="0" cy="0"/>
+          <a:chOff x="0" y="0"/>
+          <a:chExt cx="0" cy="0"/>
+        </a:xfrm>
+      </p:grpSpPr>
+      <p:sp>
+        <p:nvSpPr>
+          <p:cNvPr id="2" name="Slide Image Placeholder 1"/>
+          <p:cNvSpPr>
+            <a:spLocks noGrp="1" noRot="1" noChangeAspect="1"/>
+          </p:cNvSpPr>
+          <p:nvPr>
+            <p:ph type="sldImg"/>
+          </p:nvPr>
+        </p:nvSpPr>
+        <p:spPr/>
+      </p:sp>
+      <p:sp>
+        <p:nvSpPr>
+          <p:cNvPr id="3" name="Notes Placeholder 2"/>
+          <p:cNvSpPr>
+            <a:spLocks noGrp="1"/>
+          </p:cNvSpPr>
+          <p:nvPr>
+            <p:ph type="body" idx="1"/>
+          </p:nvPr>
+        </p:nvSpPr>
+        <p:spPr/>
+        <p:txBody>
+          <a:bodyPr/>
+          <a:lstStyle/>
+          <a:p>
+            <a:r>
+              <a:t>ПОвАЖНО: Entity класовете НЕ наследяват нищо. Чисти POCO.</a:t>
+            </a:r>
+          </a:p>
+        </p:txBody>
+      </p:sp>
+      <p:sp>
+        <p:nvSpPr>
+          <p:cNvPr id="5" name="Slide Number Placeholder 4"/>
+          <p:cNvSpPr>
+            <a:spLocks noGrp="1"/>
+          </p:cNvSpPr>
+          <p:nvPr>
+            <p:ph type="sldNum" sz="quarter" idx="11"/>
+          </p:nvPr>
+        </p:nvSpPr>
+        <p:spPr/>
+        <p:txBody>
+          <a:bodyPr/>
+          <a:lstStyle/>
+          <a:p>
+            <a:fld id="{3EBA5BD7-F043-4D1B-AA17-CD412FC534DE}" type="slidenum">
+              <a:rPr lang="en-US" smtClean="0"/>
+              <a:pPr/>
+              <a:t>8</a:t>
+            </a:fld>
+            <a:endParaRPr lang="en-US" dirty="0"/>
+          </a:p>
+        </p:txBody>
+      </p:sp>
+      <p:sp>
+        <p:nvSpPr>
+          <p:cNvPr id="6" name="Footer Placeholder">
+            <a:extLst>
+              <a:ext uri="{FF2B5EF4-FFF2-40B4-BE49-F238E27FC236}">
+                <a16:creationId xmlns:a16="http://schemas.microsoft.com/office/drawing/2014/main" id="{F2E7AA30-B4A7-4547-B0A0-1F4BBD26848C}"/>
+              </a:ext>
+            </a:extLst>
+          </p:cNvPr>
+          <p:cNvSpPr>
+            <a:spLocks noGrp="1"/>
+          </p:cNvSpPr>
+          <p:nvPr>
+            <p:ph type="ftr" sz="quarter" idx="4"/>
+          </p:nvPr>
+        </p:nvSpPr>
+        <p:spPr>
+          <a:xfrm>
+            <a:off x="-1" y="8747999"/>
+            <a:ext cx="6308999" cy="394413"/>
+          </a:xfrm>
+          <a:prstGeom prst="rect">
+            <a:avLst/>
+          </a:prstGeom>
+        </p:spPr>
+        <p:txBody>
+          <a:bodyPr vert="horz" lIns="91440" tIns="45720" rIns="91440" bIns="45720" rtlCol="0" anchor="b"/>
+          <a:lstStyle>
+            <a:lvl1pPr algn="l">
+              <a:defRPr sz="1000"/>
+            </a:lvl1pPr>
+          </a:lstStyle>
+          <a:p>
+            <a:r>
+              <a:rPr lang="en-US" dirty="0"/>
+              <a:t>Created by the </a:t>
+            </a:r>
+            <a:r>
+              <a:rPr lang="en-US" b="1" dirty="0"/>
+              <a:t>Software University Foundation</a:t>
+            </a:r>
+            <a:r>
+              <a:rPr lang="en-US" dirty="0"/>
+              <a:t> – </a:t>
+            </a:r>
+            <a:r>
+              <a:rPr lang="en-US" u="sng" dirty="0">
+                <a:hlinkClick r:id="rId3"/>
+              </a:rPr>
+              <a:t>https://softuni.foundation</a:t>
+            </a:r>
+            <a:endParaRPr lang="en-US" dirty="0"/>
+          </a:p>
+          <a:p>
+            <a:r>
+              <a:rPr lang="en-US" dirty="0"/>
+              <a:t>This work is licensed under the </a:t>
+            </a:r>
+            <a:r>
+              <a:rPr lang="en-US" u="sng" noProof="1">
+                <a:hlinkClick r:id="rId4"/>
+              </a:rPr>
+              <a:t>Creative Commons Attribution-NonCommercial-ShareAlike</a:t>
+            </a:r>
+            <a:r>
+              <a:rPr lang="en-US" noProof="1"/>
+              <a:t> </a:t>
+            </a:r>
+            <a:r>
+              <a:rPr lang="en-US" dirty="0"/>
+              <a:t>license.</a:t>
+            </a:r>
+          </a:p>
+        </p:txBody>
+      </p:sp>
+    </p:spTree>
+    <p:extLst>
+      <p:ext uri="{BB962C8B-B14F-4D97-AF65-F5344CB8AC3E}">
         <p14:creationId xmlns:p14="http://schemas.microsoft.com/office/powerpoint/2010/main" val="367922300"/>
       </p:ext>
     </p:extLst>
+  </p:cSld>
+  <p:clrMapOvr>
+    <a:masterClrMapping/>
+  </p:clrMapOvr>
+</p:notes>
+</file>
+
+<file path=ppt/notesSlides/notesSlide9.xml><?xml version="1.0" encoding="utf-8"?>
+<p:notes xmlns:a="http://schemas.openxmlformats.org/drawingml/2006/main" xmlns:r="http://schemas.openxmlformats.org/officeDocument/2006/relationships" xmlns:p="http://schemas.openxmlformats.org/presentationml/2006/main">
+  <p:cSld>
+    <p:spTree>
+      <p:nvGrpSpPr>
+        <p:cNvPr id="1" name=""/>
+        <p:cNvGrpSpPr/>
+        <p:nvPr/>
+      </p:nvGrpSpPr>
+      <p:grpSpPr>
+        <a:xfrm>
+          <a:off x="0" y="0"/>
+          <a:ext cx="0" cy="0"/>
+          <a:chOff x="0" y="0"/>
+          <a:chExt cx="0" cy="0"/>
+        </a:xfrm>
+      </p:grpSpPr>
+      <p:sp>
+        <p:nvSpPr>
+          <p:cNvPr id="2" name="Slide Image Placeholder 1"/>
+          <p:cNvSpPr>
+            <a:spLocks noGrp="1" noRot="1" noChangeAspect="1"/>
+          </p:cNvSpPr>
+          <p:nvPr>
+            <p:ph type="sldImg" idx="2"/>
+          </p:nvPr>
+        </p:nvSpPr>
+        <p:spPr/>
+      </p:sp>
+      <p:sp>
+        <p:nvSpPr>
+          <p:cNvPr id="3" name="Notes Placeholder 2"/>
+          <p:cNvSpPr>
+            <a:spLocks noGrp="1"/>
+          </p:cNvSpPr>
+          <p:nvPr>
+            <p:ph type="body" sz="quarter" idx="3"/>
+          </p:nvPr>
+        </p:nvSpPr>
+        <p:spPr/>
+        <p:txBody>
+          <a:bodyPr/>
+          <a:lstStyle/>
+          <a:p>
+            <a:r>
+              <a:t>ICollection&lt;Employee&gt; = SELECT * WHERE DepartmentId=X. Двупосочна навигация.</a:t>
+            </a:r>
+          </a:p>
+        </p:txBody>
+      </p:sp>
+      <p:sp>
+        <p:nvSpPr>
+          <p:cNvPr id="4" name="Slide Number Placeholder 3"/>
+          <p:cNvSpPr>
+            <a:spLocks noGrp="1"/>
+          </p:cNvSpPr>
+          <p:nvPr>
+            <p:ph type="sldNum" sz="quarter" idx="5"/>
+          </p:nvPr>
+        </p:nvSpPr>
+        <p:spPr/>
+      </p:sp>
+    </p:spTree>
   </p:cSld>
   <p:clrMapOvr>
     <a:masterClrMapping/>
@@ -1625,7 +2193,7 @@
           <a:p>
             <a:fld id="{EF069AEA-C8BE-4DD6-B9AB-21EA40DF5D87}" type="datetimeFigureOut">
               <a:rPr lang="bg-BG" smtClean="0"/>
-              <a:t>22.2.2023 г.</a:t>
+              <a:t>25.3.2026 г.</a:t>
             </a:fld>
             <a:endParaRPr lang="bg-BG"/>
           </a:p>
@@ -1795,7 +2363,7 @@
           <a:p>
             <a:fld id="{EF069AEA-C8BE-4DD6-B9AB-21EA40DF5D87}" type="datetimeFigureOut">
               <a:rPr lang="bg-BG" smtClean="0"/>
-              <a:t>22.2.2023 г.</a:t>
+              <a:t>25.3.2026 г.</a:t>
             </a:fld>
             <a:endParaRPr lang="bg-BG"/>
           </a:p>
@@ -1975,7 +2543,7 @@
           <a:p>
             <a:fld id="{EF069AEA-C8BE-4DD6-B9AB-21EA40DF5D87}" type="datetimeFigureOut">
               <a:rPr lang="bg-BG" smtClean="0"/>
-              <a:t>22.2.2023 г.</a:t>
+              <a:t>25.3.2026 г.</a:t>
             </a:fld>
             <a:endParaRPr lang="bg-BG"/>
           </a:p>
@@ -2145,7 +2713,7 @@
           <a:p>
             <a:fld id="{EF069AEA-C8BE-4DD6-B9AB-21EA40DF5D87}" type="datetimeFigureOut">
               <a:rPr lang="bg-BG" smtClean="0"/>
-              <a:t>22.2.2023 г.</a:t>
+              <a:t>25.3.2026 г.</a:t>
             </a:fld>
             <a:endParaRPr lang="bg-BG"/>
           </a:p>
@@ -2391,7 +2959,7 @@
           <a:p>
             <a:fld id="{EF069AEA-C8BE-4DD6-B9AB-21EA40DF5D87}" type="datetimeFigureOut">
               <a:rPr lang="bg-BG" smtClean="0"/>
-              <a:t>22.2.2023 г.</a:t>
+              <a:t>25.3.2026 г.</a:t>
             </a:fld>
             <a:endParaRPr lang="bg-BG"/>
           </a:p>
@@ -2623,7 +3191,7 @@
           <a:p>
             <a:fld id="{EF069AEA-C8BE-4DD6-B9AB-21EA40DF5D87}" type="datetimeFigureOut">
               <a:rPr lang="bg-BG" smtClean="0"/>
-              <a:t>22.2.2023 г.</a:t>
+              <a:t>25.3.2026 г.</a:t>
             </a:fld>
             <a:endParaRPr lang="bg-BG"/>
           </a:p>
@@ -2990,7 +3558,7 @@
           <a:p>
             <a:fld id="{EF069AEA-C8BE-4DD6-B9AB-21EA40DF5D87}" type="datetimeFigureOut">
               <a:rPr lang="bg-BG" smtClean="0"/>
-              <a:t>22.2.2023 г.</a:t>
+              <a:t>25.3.2026 г.</a:t>
             </a:fld>
             <a:endParaRPr lang="bg-BG"/>
           </a:p>
@@ -3108,7 +3676,7 @@
           <a:p>
             <a:fld id="{EF069AEA-C8BE-4DD6-B9AB-21EA40DF5D87}" type="datetimeFigureOut">
               <a:rPr lang="bg-BG" smtClean="0"/>
-              <a:t>22.2.2023 г.</a:t>
+              <a:t>25.3.2026 г.</a:t>
             </a:fld>
             <a:endParaRPr lang="bg-BG"/>
           </a:p>
@@ -3203,7 +3771,7 @@
           <a:p>
             <a:fld id="{EF069AEA-C8BE-4DD6-B9AB-21EA40DF5D87}" type="datetimeFigureOut">
               <a:rPr lang="bg-BG" smtClean="0"/>
-              <a:t>22.2.2023 г.</a:t>
+              <a:t>25.3.2026 г.</a:t>
             </a:fld>
             <a:endParaRPr lang="bg-BG"/>
           </a:p>
@@ -3480,7 +4048,7 @@
           <a:p>
             <a:fld id="{EF069AEA-C8BE-4DD6-B9AB-21EA40DF5D87}" type="datetimeFigureOut">
               <a:rPr lang="bg-BG" smtClean="0"/>
-              <a:t>22.2.2023 г.</a:t>
+              <a:t>25.3.2026 г.</a:t>
             </a:fld>
             <a:endParaRPr lang="bg-BG"/>
           </a:p>
@@ -3737,7 +4305,7 @@
           <a:p>
             <a:fld id="{EF069AEA-C8BE-4DD6-B9AB-21EA40DF5D87}" type="datetimeFigureOut">
               <a:rPr lang="bg-BG" smtClean="0"/>
-              <a:t>22.2.2023 г.</a:t>
+              <a:t>25.3.2026 г.</a:t>
             </a:fld>
             <a:endParaRPr lang="bg-BG"/>
           </a:p>
@@ -3950,7 +4518,7 @@
           <a:p>
             <a:fld id="{EF069AEA-C8BE-4DD6-B9AB-21EA40DF5D87}" type="datetimeFigureOut">
               <a:rPr lang="bg-BG" smtClean="0"/>
-              <a:t>22.2.2023 г.</a:t>
+              <a:t>25.3.2026 г.</a:t>
             </a:fld>
             <a:endParaRPr lang="bg-BG"/>
           </a:p>
@@ -4452,7 +5020,7 @@
           <p:nvPr/>
         </p:nvPicPr>
         <p:blipFill>
-          <a:blip r:embed="rId2">
+          <a:blip r:embed="rId3" cstate="hqprint">
             <a:extLst>
               <a:ext uri="{28A0092B-C50C-407E-A947-70E740481C1C}">
                 <a14:useLocalDpi xmlns:a14="http://schemas.microsoft.com/office/drawing/2010/main" val="0"/>
@@ -4498,7 +5066,7 @@
           <p:nvPr/>
         </p:nvPicPr>
         <p:blipFill>
-          <a:blip r:embed="rId3">
+          <a:blip r:embed="rId4">
             <a:extLst>
               <a:ext uri="{28A0092B-C50C-407E-A947-70E740481C1C}">
                 <a14:useLocalDpi xmlns:a14="http://schemas.microsoft.com/office/drawing/2010/main" val="0"/>
@@ -4756,10 +5324,10 @@
                 <a:latin typeface="Comfortaa" pitchFamily="2" charset="0"/>
                 <a:ea typeface="Times New Roman" panose="02020603050405020304" pitchFamily="18" charset="0"/>
                 <a:cs typeface="Calibri" panose="020F0502020204030204" pitchFamily="34" charset="0"/>
-                <a:hlinkClick r:id="rId4">
+                <a:hlinkClick r:id="rId5">
                   <a:extLst>
                     <a:ext uri="{A12FA001-AC4F-418D-AE19-62706E023703}">
-                      <ahyp:hlinkClr xmlns:ahyp="http://schemas.microsoft.com/office/drawing/2018/hyperlinkcolor" val="tx"/>
+                      <ahyp:hlinkClr xmlns:ahyp="http://schemas.microsoft.com/office/drawing/2018/hyperlinkcolor" xmlns="" val="tx"/>
                     </a:ext>
                   </a:extLst>
                 </a:hlinkClick>
@@ -5904,489 +6472,161 @@
           <a:chExt cx="0" cy="0"/>
         </a:xfrm>
       </p:grpSpPr>
-      <p:pic>
-        <p:nvPicPr>
-          <p:cNvPr id="6" name="Picture 3" descr="Icon&#10;&#10;Description automatically generated with medium confidence">
-            <a:extLst>
-              <a:ext uri="{FF2B5EF4-FFF2-40B4-BE49-F238E27FC236}">
-                <a16:creationId xmlns:a16="http://schemas.microsoft.com/office/drawing/2014/main" id="{09547CF4-B25A-F864-DA65-5C7F1F83C48B}"/>
-              </a:ext>
-            </a:extLst>
-          </p:cNvPr>
-          <p:cNvPicPr>
-            <a:picLocks noChangeAspect="1" noChangeArrowheads="1"/>
-          </p:cNvPicPr>
-          <p:nvPr/>
-        </p:nvPicPr>
-        <p:blipFill>
-          <a:blip r:embed="rId2">
-            <a:extLst>
-              <a:ext uri="{28A0092B-C50C-407E-A947-70E740481C1C}">
-                <a14:useLocalDpi xmlns:a14="http://schemas.microsoft.com/office/drawing/2010/main" val="0"/>
-              </a:ext>
-            </a:extLst>
-          </a:blip>
-          <a:srcRect/>
-          <a:stretch>
-            <a:fillRect/>
-          </a:stretch>
-        </p:blipFill>
-        <p:spPr bwMode="auto">
-          <a:xfrm>
-            <a:off x="144352" y="83713"/>
-            <a:ext cx="1575455" cy="1575458"/>
-          </a:xfrm>
-          <a:prstGeom prst="rect">
-            <a:avLst/>
-          </a:prstGeom>
-          <a:extLst>
-            <a:ext uri="{909E8E84-426E-40DD-AFC4-6F175D3DCCD1}">
-              <a14:hiddenFill xmlns:a14="http://schemas.microsoft.com/office/drawing/2010/main">
-                <a:solidFill>
-                  <a:srgbClr val="FFFFFF"/>
-                </a:solidFill>
-              </a14:hiddenFill>
-            </a:ext>
-          </a:extLst>
-        </p:spPr>
-      </p:pic>
-      <p:pic>
-        <p:nvPicPr>
-          <p:cNvPr id="7" name="Picture 4">
-            <a:extLst>
-              <a:ext uri="{FF2B5EF4-FFF2-40B4-BE49-F238E27FC236}">
-                <a16:creationId xmlns:a16="http://schemas.microsoft.com/office/drawing/2014/main" id="{A303128A-0EF3-84BD-F9ED-2E6316CD08AE}"/>
-              </a:ext>
-            </a:extLst>
-          </p:cNvPr>
-          <p:cNvPicPr>
-            <a:picLocks noChangeAspect="1" noChangeArrowheads="1"/>
-          </p:cNvPicPr>
-          <p:nvPr/>
-        </p:nvPicPr>
-        <p:blipFill>
-          <a:blip r:embed="rId3">
-            <a:extLst>
-              <a:ext uri="{28A0092B-C50C-407E-A947-70E740481C1C}">
-                <a14:useLocalDpi xmlns:a14="http://schemas.microsoft.com/office/drawing/2010/main" val="0"/>
-              </a:ext>
-            </a:extLst>
-          </a:blip>
-          <a:srcRect/>
-          <a:stretch>
-            <a:fillRect/>
-          </a:stretch>
-        </p:blipFill>
-        <p:spPr bwMode="auto">
-          <a:xfrm>
-            <a:off x="10404792" y="83713"/>
-            <a:ext cx="1699472" cy="1414696"/>
-          </a:xfrm>
-          <a:prstGeom prst="rect">
-            <a:avLst/>
-          </a:prstGeom>
-          <a:noFill/>
-          <a:extLst>
-            <a:ext uri="{909E8E84-426E-40DD-AFC4-6F175D3DCCD1}">
-              <a14:hiddenFill xmlns:a14="http://schemas.microsoft.com/office/drawing/2010/main">
-                <a:solidFill>
-                  <a:srgbClr val="FFFFFF"/>
-                </a:solidFill>
-              </a14:hiddenFill>
-            </a:ext>
-          </a:extLst>
-        </p:spPr>
-      </p:pic>
-      <p:sp>
-        <p:nvSpPr>
-          <p:cNvPr id="8" name="TextBox 7">
-            <a:extLst>
-              <a:ext uri="{FF2B5EF4-FFF2-40B4-BE49-F238E27FC236}">
-                <a16:creationId xmlns:a16="http://schemas.microsoft.com/office/drawing/2014/main" id="{F4EB993A-D432-5177-9922-4D00100F74D8}"/>
-              </a:ext>
-            </a:extLst>
-          </p:cNvPr>
-          <p:cNvSpPr txBox="1"/>
-          <p:nvPr/>
-        </p:nvSpPr>
-        <p:spPr>
-          <a:xfrm>
-            <a:off x="1734047" y="365284"/>
-            <a:ext cx="4729447" cy="923330"/>
-          </a:xfrm>
-          <a:prstGeom prst="rect">
-            <a:avLst/>
-          </a:prstGeom>
-          <a:noFill/>
-        </p:spPr>
-        <p:txBody>
-          <a:bodyPr wrap="square">
-            <a:spAutoFit/>
-          </a:bodyPr>
-          <a:lstStyle/>
-          <a:p>
-            <a:pPr marL="0" marR="0">
-              <a:spcBef>
-                <a:spcPts val="0"/>
-              </a:spcBef>
-              <a:spcAft>
-                <a:spcPts val="0"/>
-              </a:spcAft>
-            </a:pPr>
-            <a:r>
-              <a:rPr lang="bg-BG" dirty="0">
-                <a:solidFill>
-                  <a:schemeClr val="tx1"/>
-                </a:solidFill>
-                <a:effectLst/>
-                <a:latin typeface="Comfortaa" pitchFamily="2" charset="0"/>
-                <a:ea typeface="Times New Roman" panose="02020603050405020304" pitchFamily="18" charset="0"/>
-                <a:cs typeface="Calibri" panose="020F0502020204030204" pitchFamily="34" charset="0"/>
-              </a:rPr>
-              <a:t>Национална програма </a:t>
-            </a:r>
-            <a:endParaRPr lang="bg-BG" dirty="0">
-              <a:solidFill>
-                <a:schemeClr val="tx1"/>
-              </a:solidFill>
-              <a:effectLst/>
-              <a:latin typeface="Comfortaa" pitchFamily="2" charset="0"/>
-              <a:ea typeface="Times New Roman" panose="02020603050405020304" pitchFamily="18" charset="0"/>
-              <a:cs typeface="Arial" panose="020B0604020202020204" pitchFamily="34" charset="0"/>
-            </a:endParaRPr>
-          </a:p>
-          <a:p>
-            <a:pPr marL="0" marR="0">
-              <a:spcBef>
-                <a:spcPts val="0"/>
-              </a:spcBef>
-              <a:spcAft>
-                <a:spcPts val="0"/>
-              </a:spcAft>
-            </a:pPr>
-            <a:r>
-              <a:rPr lang="en-US" dirty="0">
-                <a:solidFill>
-                  <a:schemeClr val="tx1"/>
-                </a:solidFill>
-                <a:effectLst/>
-                <a:latin typeface="Comfortaa" pitchFamily="2" charset="0"/>
-                <a:ea typeface="Times New Roman" panose="02020603050405020304" pitchFamily="18" charset="0"/>
-                <a:cs typeface="Calibri" panose="020F0502020204030204" pitchFamily="34" charset="0"/>
-              </a:rPr>
-              <a:t>"</a:t>
-            </a:r>
-            <a:r>
-              <a:rPr lang="bg-BG" dirty="0">
-                <a:solidFill>
-                  <a:schemeClr val="tx1"/>
-                </a:solidFill>
-                <a:effectLst/>
-                <a:latin typeface="Comfortaa" pitchFamily="2" charset="0"/>
-                <a:ea typeface="Times New Roman" panose="02020603050405020304" pitchFamily="18" charset="0"/>
-                <a:cs typeface="Calibri" panose="020F0502020204030204" pitchFamily="34" charset="0"/>
-              </a:rPr>
-              <a:t>Обучение за ИТ умения и кариера</a:t>
-            </a:r>
-            <a:r>
-              <a:rPr lang="en-US" dirty="0">
-                <a:solidFill>
-                  <a:schemeClr val="tx1"/>
-                </a:solidFill>
-                <a:effectLst/>
-                <a:latin typeface="Comfortaa" pitchFamily="2" charset="0"/>
-                <a:ea typeface="Times New Roman" panose="02020603050405020304" pitchFamily="18" charset="0"/>
-                <a:cs typeface="Calibri" panose="020F0502020204030204" pitchFamily="34" charset="0"/>
-              </a:rPr>
-              <a:t>"</a:t>
-            </a:r>
-            <a:endParaRPr lang="bg-BG" dirty="0">
-              <a:solidFill>
-                <a:schemeClr val="tx1"/>
-              </a:solidFill>
-              <a:effectLst/>
-              <a:latin typeface="Comfortaa" pitchFamily="2" charset="0"/>
-              <a:ea typeface="Times New Roman" panose="02020603050405020304" pitchFamily="18" charset="0"/>
-              <a:cs typeface="Arial" panose="020B0604020202020204" pitchFamily="34" charset="0"/>
-            </a:endParaRPr>
-          </a:p>
-          <a:p>
-            <a:pPr marL="0" marR="0">
-              <a:spcBef>
-                <a:spcPts val="0"/>
-              </a:spcBef>
-              <a:spcAft>
-                <a:spcPts val="0"/>
-              </a:spcAft>
-              <a:tabLst>
-                <a:tab pos="2865755" algn="ctr"/>
-                <a:tab pos="5731510" algn="r"/>
-              </a:tabLst>
-            </a:pPr>
-            <a:r>
-              <a:rPr lang="bg-BG" u="sng" dirty="0">
-                <a:latin typeface="Comfortaa" pitchFamily="2" charset="0"/>
-                <a:ea typeface="Times New Roman" panose="02020603050405020304" pitchFamily="18" charset="0"/>
-                <a:cs typeface="Calibri" panose="020F0502020204030204" pitchFamily="34" charset="0"/>
-              </a:rPr>
-              <a:t>https://it-kariera.mon.bg</a:t>
-            </a:r>
-            <a:endParaRPr lang="bg-BG" dirty="0">
-              <a:solidFill>
-                <a:schemeClr val="tx1"/>
-              </a:solidFill>
-              <a:effectLst/>
-              <a:latin typeface="Comfortaa" pitchFamily="2" charset="0"/>
-              <a:ea typeface="Times New Roman" panose="02020603050405020304" pitchFamily="18" charset="0"/>
-              <a:cs typeface="Arial" panose="020B0604020202020204" pitchFamily="34" charset="0"/>
-            </a:endParaRPr>
-          </a:p>
-        </p:txBody>
-      </p:sp>
-      <p:sp>
-        <p:nvSpPr>
-          <p:cNvPr id="9" name="TextBox 8">
-            <a:extLst>
-              <a:ext uri="{FF2B5EF4-FFF2-40B4-BE49-F238E27FC236}">
-                <a16:creationId xmlns:a16="http://schemas.microsoft.com/office/drawing/2014/main" id="{B522BFFF-21D1-37C4-D08A-94EDDBB11DD9}"/>
-              </a:ext>
-            </a:extLst>
-          </p:cNvPr>
-          <p:cNvSpPr txBox="1"/>
-          <p:nvPr/>
-        </p:nvSpPr>
-        <p:spPr>
-          <a:xfrm>
-            <a:off x="6373448" y="365284"/>
-            <a:ext cx="4017104" cy="923330"/>
-          </a:xfrm>
-          <a:prstGeom prst="rect">
-            <a:avLst/>
-          </a:prstGeom>
-          <a:noFill/>
-        </p:spPr>
-        <p:txBody>
-          <a:bodyPr wrap="square">
-            <a:spAutoFit/>
-          </a:bodyPr>
-          <a:lstStyle/>
-          <a:p>
-            <a:pPr marL="0" marR="0" algn="r">
-              <a:spcBef>
-                <a:spcPts val="0"/>
-              </a:spcBef>
-              <a:spcAft>
-                <a:spcPts val="0"/>
-              </a:spcAft>
-            </a:pPr>
-            <a:r>
-              <a:rPr lang="bg-BG" dirty="0">
-                <a:solidFill>
-                  <a:schemeClr val="tx1"/>
-                </a:solidFill>
-                <a:effectLst/>
-                <a:latin typeface="Comfortaa" pitchFamily="2" charset="0"/>
-                <a:ea typeface="Times New Roman" panose="02020603050405020304" pitchFamily="18" charset="0"/>
-                <a:cs typeface="Calibri" panose="020F0502020204030204" pitchFamily="34" charset="0"/>
-              </a:rPr>
-              <a:t>Министерството на образованието и науката</a:t>
-            </a:r>
-            <a:endParaRPr lang="bg-BG" dirty="0">
-              <a:solidFill>
-                <a:schemeClr val="tx1"/>
-              </a:solidFill>
-              <a:effectLst/>
-              <a:latin typeface="Comfortaa" pitchFamily="2" charset="0"/>
-              <a:ea typeface="Times New Roman" panose="02020603050405020304" pitchFamily="18" charset="0"/>
-              <a:cs typeface="Arial" panose="020B0604020202020204" pitchFamily="34" charset="0"/>
-            </a:endParaRPr>
-          </a:p>
-          <a:p>
-            <a:pPr marL="0" marR="0" algn="r">
-              <a:spcBef>
-                <a:spcPts val="0"/>
-              </a:spcBef>
-              <a:spcAft>
-                <a:spcPts val="0"/>
-              </a:spcAft>
-              <a:tabLst>
-                <a:tab pos="2865755" algn="ctr"/>
-                <a:tab pos="5731510" algn="r"/>
-              </a:tabLst>
-            </a:pPr>
-            <a:r>
-              <a:rPr lang="en-US" u="sng" dirty="0">
-                <a:solidFill>
-                  <a:schemeClr val="tx1"/>
-                </a:solidFill>
-                <a:effectLst/>
-                <a:latin typeface="Comfortaa" pitchFamily="2" charset="0"/>
-                <a:ea typeface="Times New Roman" panose="02020603050405020304" pitchFamily="18" charset="0"/>
-                <a:cs typeface="Calibri" panose="020F0502020204030204" pitchFamily="34" charset="0"/>
-                <a:hlinkClick r:id="rId4">
-                  <a:extLst>
-                    <a:ext uri="{A12FA001-AC4F-418D-AE19-62706E023703}">
-                      <ahyp:hlinkClr xmlns:ahyp="http://schemas.microsoft.com/office/drawing/2018/hyperlinkcolor" val="tx"/>
-                    </a:ext>
-                  </a:extLst>
-                </a:hlinkClick>
-              </a:rPr>
-              <a:t>https://www</a:t>
-            </a:r>
-            <a:r>
-              <a:rPr lang="bg-BG" u="sng" dirty="0">
-                <a:solidFill>
-                  <a:schemeClr val="tx1"/>
-                </a:solidFill>
-                <a:effectLst/>
-                <a:latin typeface="Comfortaa" pitchFamily="2" charset="0"/>
-                <a:ea typeface="Times New Roman" panose="02020603050405020304" pitchFamily="18" charset="0"/>
-                <a:cs typeface="Calibri" panose="020F0502020204030204" pitchFamily="34" charset="0"/>
-              </a:rPr>
-              <a:t>.</a:t>
-            </a:r>
-            <a:r>
-              <a:rPr lang="en-US" u="sng" dirty="0">
-                <a:solidFill>
-                  <a:schemeClr val="tx1"/>
-                </a:solidFill>
-                <a:effectLst/>
-                <a:latin typeface="Comfortaa" pitchFamily="2" charset="0"/>
-                <a:ea typeface="Times New Roman" panose="02020603050405020304" pitchFamily="18" charset="0"/>
-                <a:cs typeface="Calibri" panose="020F0502020204030204" pitchFamily="34" charset="0"/>
-              </a:rPr>
-              <a:t>mon.bg</a:t>
-            </a:r>
-            <a:endParaRPr lang="bg-BG" dirty="0">
-              <a:latin typeface="Comfortaa" pitchFamily="2" charset="0"/>
-            </a:endParaRPr>
-          </a:p>
-        </p:txBody>
-      </p:sp>
-      <p:pic>
-        <p:nvPicPr>
-          <p:cNvPr id="2" name="Logo CC-BY-NC-SA">
-            <a:hlinkClick r:id="rId5"/>
-            <a:extLst>
-              <a:ext uri="{FF2B5EF4-FFF2-40B4-BE49-F238E27FC236}">
-                <a16:creationId xmlns:a16="http://schemas.microsoft.com/office/drawing/2014/main" id="{39F87C09-7AAD-A59F-33F5-8BECE165CB0C}"/>
-              </a:ext>
-            </a:extLst>
-          </p:cNvPr>
-          <p:cNvPicPr>
-            <a:picLocks noChangeAspect="1"/>
-          </p:cNvPicPr>
-          <p:nvPr/>
-        </p:nvPicPr>
-        <p:blipFill>
-          <a:blip r:embed="rId6"/>
-          <a:stretch>
-            <a:fillRect/>
-          </a:stretch>
-        </p:blipFill>
-        <p:spPr>
-          <a:xfrm>
-            <a:off x="4087447" y="2650021"/>
-            <a:ext cx="4017104" cy="1440815"/>
-          </a:xfrm>
-          <a:prstGeom prst="rect">
-            <a:avLst/>
-          </a:prstGeom>
-        </p:spPr>
-      </p:pic>
-      <p:sp>
-        <p:nvSpPr>
-          <p:cNvPr id="12" name="TextBox 11">
-            <a:extLst>
-              <a:ext uri="{FF2B5EF4-FFF2-40B4-BE49-F238E27FC236}">
-                <a16:creationId xmlns:a16="http://schemas.microsoft.com/office/drawing/2014/main" id="{ADBEA407-2EEF-D82D-ADB6-D20902F79FA2}"/>
-              </a:ext>
-            </a:extLst>
-          </p:cNvPr>
-          <p:cNvSpPr txBox="1"/>
-          <p:nvPr/>
-        </p:nvSpPr>
-        <p:spPr>
-          <a:xfrm>
-            <a:off x="262246" y="5452243"/>
-            <a:ext cx="11667507" cy="1200329"/>
-          </a:xfrm>
-          <a:prstGeom prst="rect">
-            <a:avLst/>
-          </a:prstGeom>
-          <a:noFill/>
-        </p:spPr>
-        <p:txBody>
-          <a:bodyPr wrap="square">
-            <a:spAutoFit/>
-          </a:bodyPr>
-          <a:lstStyle/>
-          <a:p>
-            <a:pPr algn="ctr"/>
-            <a:r>
-              <a:rPr lang="bg-BG" sz="1800" dirty="0">
-                <a:latin typeface="Comfortaa" pitchFamily="2" charset="0"/>
-              </a:rPr>
-              <a:t>Документът е разработен за нуждите на Национална програма "Обучение за ИТ умения и кариера" на Министерството на образованието и науката (МОН)</a:t>
-            </a:r>
-            <a:r>
-              <a:rPr lang="en-US" sz="1800" dirty="0">
-                <a:latin typeface="Comfortaa" pitchFamily="2" charset="0"/>
-              </a:rPr>
-              <a:t> </a:t>
-            </a:r>
-            <a:r>
-              <a:rPr lang="bg-BG" sz="1800" dirty="0">
-                <a:latin typeface="Comfortaa" pitchFamily="2" charset="0"/>
-              </a:rPr>
-              <a:t>и се разпространява под свободен лиценз CC-BY-NC-SA (</a:t>
-            </a:r>
-            <a:r>
-              <a:rPr lang="bg-BG" sz="1800" dirty="0" err="1">
-                <a:latin typeface="Comfortaa" pitchFamily="2" charset="0"/>
-              </a:rPr>
-              <a:t>Creative</a:t>
-            </a:r>
-            <a:r>
-              <a:rPr lang="bg-BG" sz="1800" dirty="0">
-                <a:latin typeface="Comfortaa" pitchFamily="2" charset="0"/>
-              </a:rPr>
-              <a:t> </a:t>
-            </a:r>
-            <a:r>
-              <a:rPr lang="bg-BG" sz="1800" dirty="0" err="1">
-                <a:latin typeface="Comfortaa" pitchFamily="2" charset="0"/>
-              </a:rPr>
-              <a:t>Commons</a:t>
-            </a:r>
-            <a:r>
-              <a:rPr lang="bg-BG" sz="1800" dirty="0">
-                <a:latin typeface="Comfortaa" pitchFamily="2" charset="0"/>
-              </a:rPr>
-              <a:t> </a:t>
-            </a:r>
-            <a:r>
-              <a:rPr lang="bg-BG" sz="1800" dirty="0" err="1">
-                <a:latin typeface="Comfortaa" pitchFamily="2" charset="0"/>
-              </a:rPr>
-              <a:t>Attribution-Non-Commercial-Share-Alike</a:t>
-            </a:r>
-            <a:r>
-              <a:rPr lang="bg-BG" sz="1800" dirty="0">
-                <a:latin typeface="Comfortaa" pitchFamily="2" charset="0"/>
-              </a:rPr>
-              <a:t> 4.0 International).</a:t>
-            </a:r>
-            <a:endParaRPr lang="bg-BG" dirty="0"/>
+      <p:sp>
+        <p:nvSpPr>
+          <p:cNvPr id="2" name="Title 1"/>
+          <p:cNvSpPr>
+            <a:spLocks noGrp="1"/>
+          </p:cNvSpPr>
+          <p:nvPr>
+            <p:ph type="title"/>
+          </p:nvPr>
+        </p:nvSpPr>
+        <p:spPr/>
+        <p:txBody>
+          <a:bodyPr/>
+          <a:lstStyle/>
+          <a:p>
+            <a:r>
+              <a:t>Рефлексия — Магията зад ORM</a:t>
+            </a:r>
+          </a:p>
+        </p:txBody>
+      </p:sp>
+      <p:sp>
+        <p:nvSpPr>
+          <p:cNvPr id="3" name="Content Placeholder 2"/>
+          <p:cNvSpPr>
+            <a:spLocks noGrp="1"/>
+          </p:cNvSpPr>
+          <p:nvPr>
+            <p:ph idx="1"/>
+          </p:nvPr>
+        </p:nvSpPr>
+        <p:spPr/>
+        <p:txBody>
+          <a:bodyPr/>
+          <a:lstStyle/>
+          <a:p>
+            <a:r>
+              <a:t>typeof(Employee).GetProperties() → всички свойства</a:t>
+            </a:r>
+          </a:p>
+          <a:p>
+            <a:r>
+              <a:t>Activator.CreateInstance&lt;T&gt;() → нов обект без new T()</a:t>
+            </a:r>
+          </a:p>
+          <a:p>
+            <a:r>
+              <a:t>property.SetValue(obj, value) → задава стойност</a:t>
+            </a:r>
+          </a:p>
+          <a:p>
+            <a:r>
+              <a:t>property.GetValue(obj) → чете стойност</a:t>
+            </a:r>
+          </a:p>
+          <a:p>
+            <a:r>
+              <a:t>MiniORM чете атрибути, генерира SQL, попълва обекти</a:t>
+            </a:r>
+          </a:p>
+          <a:p>
+            <a:r>
+              <a:t>Цена: Рефлексията е по-бавна = ORM е по-бавън</a:t>
+            </a:r>
           </a:p>
         </p:txBody>
       </p:sp>
     </p:spTree>
-    <p:extLst>
-      <p:ext uri="{BB962C8B-B14F-4D97-AF65-F5344CB8AC3E}">
-        <p14:creationId xmlns:p14="http://schemas.microsoft.com/office/powerpoint/2010/main" val="1241344677"/>
-      </p:ext>
-    </p:extLst>
+  </p:cSld>
+  <p:clrMapOvr>
+    <a:masterClrMapping/>
+  </p:clrMapOvr>
+</p:sld>
+</file>
+
+<file path=ppt/slides/slide14.xml><?xml version="1.0" encoding="utf-8"?>
+<p:sld xmlns:a="http://schemas.openxmlformats.org/drawingml/2006/main" xmlns:r="http://schemas.openxmlformats.org/officeDocument/2006/relationships" xmlns:p="http://schemas.openxmlformats.org/presentationml/2006/main">
+  <p:cSld>
+    <p:spTree>
+      <p:nvGrpSpPr>
+        <p:cNvPr id="1" name=""/>
+        <p:cNvGrpSpPr/>
+        <p:nvPr/>
+      </p:nvGrpSpPr>
+      <p:grpSpPr>
+        <a:xfrm>
+          <a:off x="0" y="0"/>
+          <a:ext cx="0" cy="0"/>
+          <a:chOff x="0" y="0"/>
+          <a:chExt cx="0" cy="0"/>
+        </a:xfrm>
+      </p:grpSpPr>
+      <p:sp>
+        <p:nvSpPr>
+          <p:cNvPr id="2" name="Title 1"/>
+          <p:cNvSpPr>
+            <a:spLocks noGrp="1"/>
+          </p:cNvSpPr>
+          <p:nvPr>
+            <p:ph type="title"/>
+          </p:nvPr>
+        </p:nvSpPr>
+        <p:spPr/>
+        <p:txBody>
+          <a:bodyPr/>
+          <a:lstStyle/>
+          <a:p>
+            <a:r>
+              <a:t>MiniORM Архитектура</a:t>
+            </a:r>
+          </a:p>
+        </p:txBody>
+      </p:sp>
+      <p:sp>
+        <p:nvSpPr>
+          <p:cNvPr id="3" name="Content Placeholder 2"/>
+          <p:cNvSpPr>
+            <a:spLocks noGrp="1"/>
+          </p:cNvSpPr>
+          <p:nvPr>
+            <p:ph idx="1"/>
+          </p:nvPr>
+        </p:nvSpPr>
+        <p:spPr/>
+        <p:txBody>
+          <a:bodyPr/>
+          <a:lstStyle/>
+          <a:p>
+            <a:r>
+              <a:t>DbContext: координатор - открива, зарежда, запазва</a:t>
+            </a:r>
+          </a:p>
+          <a:p>
+            <a:r>
+              <a:t>DbSet&lt;T&gt;: умна колекция за всяка таблица</a:t>
+            </a:r>
+          </a:p>
+          <a:p>
+            <a:r>
+              <a:t>ChangeTracker&lt;T&gt;: пазач на промените</a:t>
+            </a:r>
+          </a:p>
+          <a:p>
+            <a:r>
+              <a:t>SaveChanges(): INSERT + UPDATE + DELETE в 1 транзакция</a:t>
+            </a:r>
+          </a:p>
+          <a:p>
+            <a:r>
+              <a:t>Нарисувайте UML диаграма на дъската</a:t>
+            </a:r>
+          </a:p>
+        </p:txBody>
+      </p:sp>
+    </p:spTree>
   </p:cSld>
   <p:clrMapOvr>
     <a:masterClrMapping/>
@@ -6659,7 +6899,7 @@
           <p:nvPr/>
         </p:nvPicPr>
         <p:blipFill>
-          <a:blip r:embed="rId2">
+          <a:blip r:embed="rId3">
             <a:extLst>
               <a:ext uri="{28A0092B-C50C-407E-A947-70E740481C1C}">
                 <a14:useLocalDpi xmlns:a14="http://schemas.microsoft.com/office/drawing/2010/main" val="0"/>
@@ -7010,7 +7250,7 @@
         <p:spPr/>
         <p:txBody>
           <a:bodyPr>
-            <a:normAutofit fontScale="92500" lnSpcReduction="10000"/>
+            <a:normAutofit lnSpcReduction="10000"/>
           </a:bodyPr>
           <a:lstStyle/>
           <a:p>
@@ -7524,7 +7764,7 @@
           <p:nvPr/>
         </p:nvPicPr>
         <p:blipFill rotWithShape="1">
-          <a:blip r:embed="rId2"/>
+          <a:blip r:embed="rId3"/>
           <a:srcRect l="190" t="8279" r="-190" b="9966"/>
           <a:stretch/>
         </p:blipFill>
@@ -7555,7 +7795,7 @@
           <p:nvPr/>
         </p:nvPicPr>
         <p:blipFill>
-          <a:blip r:embed="rId3"/>
+          <a:blip r:embed="rId4"/>
           <a:stretch>
             <a:fillRect/>
           </a:stretch>
@@ -8433,7 +8673,7 @@
           <p:nvPr/>
         </p:nvPicPr>
         <p:blipFill>
-          <a:blip r:embed="rId2"/>
+          <a:blip r:embed="rId3"/>
           <a:stretch>
             <a:fillRect/>
           </a:stretch>
